--- a/docs/SRS/attachments/review/需求评审报告.pptx
+++ b/docs/SRS/attachments/review/需求评审报告.pptx
@@ -3130,7 +3130,7 @@
           <a:lstStyle/>
           <a:p>
             <a:r>
-              <a:t>版本 0.3.0 · 2026-05-13 · 状态 Draft</a:t>
+              <a:t>版本 0.3.1 · 2026-05-13 · 状态 Draft</a:t>
             </a:r>
           </a:p>
         </p:txBody>
